--- a/Prezentaciya-bot-dlya-zayavok.pptx
+++ b/Prezentaciya-bot-dlya-zayavok.pptx
@@ -3314,7 +3314,7 @@
                 </a:solidFill>
                 <a:latin typeface="Calibri"/>
               </a:rPr>
-              <a:t>Версия 1.1.1  ·  Windows 10 и новее</a:t>
+              <a:t>Версия 1.1.2  ·  Windows 10 и новее</a:t>
             </a:r>
           </a:p>
         </p:txBody>
@@ -3823,7 +3823,7 @@
                 </a:solidFill>
                 <a:latin typeface="Calibri"/>
               </a:rPr>
-              <a:t>Бот для заявок Битрикс24  ·  версия 1.1.1</a:t>
+              <a:t>Бот для заявок Битрикс24  ·  версия 1.1.2</a:t>
             </a:r>
           </a:p>
         </p:txBody>
@@ -8578,7 +8578,42 @@
       </p:sp>
       <p:sp>
         <p:nvSpPr>
-          <p:cNvPr id="10" name="Rounded Rectangle 9"/>
+          <p:cNvPr id="10" name="TextBox 9"/>
+          <p:cNvSpPr txBox="1"/>
+          <p:nvPr/>
+        </p:nvSpPr>
+        <p:spPr>
+          <a:xfrm>
+            <a:off x="1143000" y="5074920"/>
+            <a:ext cx="4572000" cy="365760"/>
+          </a:xfrm>
+          <a:prstGeom prst="rect">
+            <a:avLst/>
+          </a:prstGeom>
+          <a:noFill/>
+        </p:spPr>
+        <p:txBody>
+          <a:bodyPr wrap="square" anchor="t" lIns="0" rIns="0" tIns="0" bIns="0">
+            <a:spAutoFit/>
+          </a:bodyPr>
+          <a:lstStyle/>
+          <a:p>
+            <a:pPr algn="l"/>
+            <a:r>
+              <a:rPr sz="1300" b="0">
+                <a:solidFill>
+                  <a:srgbClr val="6B7686"/>
+                </a:solidFill>
+                <a:latin typeface="Calibri"/>
+              </a:rPr>
+              <a:t>— Нужен интернет: без проверки лицензии 14 дней работы бот встаёт.</a:t>
+            </a:r>
+          </a:p>
+        </p:txBody>
+      </p:sp>
+      <p:sp>
+        <p:nvSpPr>
+          <p:cNvPr id="11" name="Rounded Rectangle 10"/>
           <p:cNvSpPr/>
           <p:nvPr/>
         </p:nvSpPr>
@@ -8622,7 +8657,7 @@
       </p:sp>
       <p:sp>
         <p:nvSpPr>
-          <p:cNvPr id="11" name="Oval 10"/>
+          <p:cNvPr id="12" name="Oval 11"/>
           <p:cNvSpPr/>
           <p:nvPr/>
         </p:nvSpPr>
@@ -8675,7 +8710,7 @@
       </p:sp>
       <p:sp>
         <p:nvSpPr>
-          <p:cNvPr id="12" name="TextBox 11"/>
+          <p:cNvPr id="13" name="TextBox 12"/>
           <p:cNvSpPr txBox="1"/>
           <p:nvPr/>
         </p:nvSpPr>
@@ -8710,7 +8745,7 @@
       </p:sp>
       <p:sp>
         <p:nvSpPr>
-          <p:cNvPr id="13" name="TextBox 12"/>
+          <p:cNvPr id="14" name="TextBox 13"/>
           <p:cNvSpPr txBox="1"/>
           <p:nvPr/>
         </p:nvSpPr>
@@ -8745,7 +8780,7 @@
       </p:sp>
       <p:sp>
         <p:nvSpPr>
-          <p:cNvPr id="14" name="TextBox 13"/>
+          <p:cNvPr id="15" name="TextBox 14"/>
           <p:cNvSpPr txBox="1"/>
           <p:nvPr/>
         </p:nvSpPr>
@@ -8780,7 +8815,7 @@
       </p:sp>
       <p:sp>
         <p:nvSpPr>
-          <p:cNvPr id="15" name="TextBox 14"/>
+          <p:cNvPr id="16" name="TextBox 15"/>
           <p:cNvSpPr txBox="1"/>
           <p:nvPr/>
         </p:nvSpPr>

--- a/Prezentaciya-bot-dlya-zayavok.pptx
+++ b/Prezentaciya-bot-dlya-zayavok.pptx
@@ -3314,7 +3314,7 @@
                 </a:solidFill>
                 <a:latin typeface="Calibri"/>
               </a:rPr>
-              <a:t>Версия 1.1.2  ·  Windows 10 и новее</a:t>
+              <a:t>Версия 1.1.3  ·  Windows 10 и новее</a:t>
             </a:r>
           </a:p>
         </p:txBody>
@@ -3490,7 +3490,7 @@
                 </a:solidFill>
                 <a:latin typeface="Calibri"/>
               </a:rPr>
-              <a:t>Windows 10 и новее</a:t>
+              <a:t>Windows 10 (2004) или 11</a:t>
             </a:r>
           </a:p>
         </p:txBody>
@@ -3525,7 +3525,7 @@
                 </a:solidFill>
                 <a:latin typeface="Calibri"/>
               </a:rPr>
-              <a:t>ставится без прав администратора</a:t>
+              <a:t>сборка 19041 и новее, без прав администратора</a:t>
             </a:r>
           </a:p>
         </p:txBody>
@@ -3604,7 +3604,7 @@
                 </a:solidFill>
                 <a:latin typeface="Calibri"/>
               </a:rPr>
-              <a:t>Chrome или Edge</a:t>
+              <a:t>Браузер Chromium</a:t>
             </a:r>
           </a:p>
         </p:txBody>
@@ -3639,7 +3639,7 @@
                 </a:solidFill>
                 <a:latin typeface="Calibri"/>
               </a:rPr>
-              <a:t>программа работает через браузер</a:t>
+              <a:t>Edge уже есть в Windows; подойдут Chrome, Яндекс, Brave</a:t>
             </a:r>
           </a:p>
         </p:txBody>
@@ -3823,7 +3823,7 @@
                 </a:solidFill>
                 <a:latin typeface="Calibri"/>
               </a:rPr>
-              <a:t>Бот для заявок Битрикс24  ·  версия 1.1.2</a:t>
+              <a:t>Бот для заявок Битрикс24  ·  версия 1.1.3</a:t>
             </a:r>
           </a:p>
         </p:txBody>
